--- a/templates/decks/bcc-federal-briefing.pptx
+++ b/templates/decks/bcc-federal-briefing.pptx
@@ -3750,7 +3750,7 @@
                 </a:solidFill>
                 <a:latin typeface="Consolas"/>
               </a:rPr>
-              <a:t>5,156 HOMES  ·  18 ENTITLED SITES  ·  906-HOME LAUNCHPAD COHORT  ·  2026 GROUND-BREAK</a:t>
+              <a:t>5,623 HOMES  ·  21 ENTITLED SITES  ·  906-HOME LAUNCHPAD COHORT  ·  2026 GROUND-BREAK</a:t>
             </a:r>
           </a:p>
         </p:txBody>
@@ -4080,7 +4080,7 @@
                 </a:solidFill>
                 <a:latin typeface="Georgia"/>
               </a:rPr>
-              <a:t>5,156</a:t>
+              <a:t>5,623</a:t>
             </a:r>
           </a:p>
         </p:txBody>
@@ -4158,7 +4158,7 @@
                 </a:solidFill>
                 <a:latin typeface="Georgia"/>
               </a:rPr>
-              <a:t>18</a:t>
+              <a:t>21</a:t>
             </a:r>
           </a:p>
         </p:txBody>
@@ -5731,7 +5731,7 @@
                 </a:solidFill>
                 <a:latin typeface="Georgia"/>
               </a:rPr>
-              <a:t>5,156</a:t>
+              <a:t>5,623</a:t>
             </a:r>
           </a:p>
         </p:txBody>
@@ -5852,7 +5852,7 @@
                 </a:solidFill>
                 <a:latin typeface="Georgia"/>
               </a:rPr>
-              <a:t>18</a:t>
+              <a:t>21</a:t>
             </a:r>
           </a:p>
         </p:txBody>
